--- a/outputs/toresaku-kochi2026-slides.pptx
+++ b/outputs/toresaku-kochi2026-slides.pptx
@@ -2522,7 +2522,7 @@
                 <a:ea typeface="Noto Sans JP" pitchFamily="34" charset="-122"/>
                 <a:cs typeface="Noto Sans JP" pitchFamily="34" charset="-120"/>
               </a:rPr>
-              <a:t>toresaku.com/lp.html</a:t>
+              <a:t>toresaku.com</a:t>
             </a:r>
             <a:endParaRPr lang="en-US" sz="1800" dirty="0"/>
           </a:p>
